--- a/business-plans/prasadam-vertical/02_Presentation.pptx
+++ b/business-plans/prasadam-vertical/02_Presentation.pptx
@@ -4141,7 +4141,7 @@
                 </a:solidFill>
                 <a:latin typeface="Calibri"/>
               </a:rPr>
-              <a:t>v1.0 draft, 26 September 2026</a:t>
+              <a:t>v1.2, 21 October 2026</a:t>
             </a:r>
           </a:p>
         </p:txBody>
